--- a/semester2/Manisha_Cohort_Showcase.pptx
+++ b/semester2/Manisha_Cohort_Showcase.pptx
@@ -5,18 +5,16 @@
     <p:sldMasterId id="2147483648" r:id="rId1"/>
   </p:sldMasterIdLst>
   <p:notesMasterIdLst>
-    <p:notesMasterId r:id="rId11"/>
+    <p:notesMasterId r:id="rId9"/>
   </p:notesMasterIdLst>
   <p:sldIdLst>
     <p:sldId id="256" r:id="rId2"/>
-    <p:sldId id="257" r:id="rId3"/>
-    <p:sldId id="258" r:id="rId4"/>
-    <p:sldId id="259" r:id="rId5"/>
-    <p:sldId id="260" r:id="rId6"/>
-    <p:sldId id="261" r:id="rId7"/>
-    <p:sldId id="262" r:id="rId8"/>
-    <p:sldId id="263" r:id="rId9"/>
-    <p:sldId id="264" r:id="rId10"/>
+    <p:sldId id="259" r:id="rId3"/>
+    <p:sldId id="260" r:id="rId4"/>
+    <p:sldId id="261" r:id="rId5"/>
+    <p:sldId id="262" r:id="rId6"/>
+    <p:sldId id="263" r:id="rId7"/>
+    <p:sldId id="264" r:id="rId8"/>
   </p:sldIdLst>
   <p:sldSz cx="9144000" cy="5143500" type="screen16x9"/>
   <p:notesSz cx="5143500" cy="9144000"/>
@@ -118,6 +116,80 @@
     </p:ext>
   </p:extLst>
 </p:presentation>
+</file>
+
+<file path=ppt/changesInfos/changesInfo1.xml><?xml version="1.0" encoding="utf-8"?>
+<pc:chgInfo xmlns:a="http://schemas.openxmlformats.org/drawingml/2006/main" xmlns:r="http://schemas.openxmlformats.org/officeDocument/2006/relationships" xmlns:ac="http://schemas.microsoft.com/office/drawing/2013/main/command" xmlns:pc="http://schemas.microsoft.com/office/powerpoint/2013/main/command">
+  <pc:docChgLst>
+    <pc:chgData name="Manisha Gupta" userId="f44a8969790790db" providerId="LiveId" clId="{B781FB94-6E4B-437E-8219-F7473AA9D3A4}"/>
+    <pc:docChg chg="custSel delSld modSld">
+      <pc:chgData name="Manisha Gupta" userId="f44a8969790790db" providerId="LiveId" clId="{B781FB94-6E4B-437E-8219-F7473AA9D3A4}" dt="2026-03-26T02:44:31.065" v="14" actId="20577"/>
+      <pc:docMkLst>
+        <pc:docMk/>
+      </pc:docMkLst>
+      <pc:sldChg chg="del">
+        <pc:chgData name="Manisha Gupta" userId="f44a8969790790db" providerId="LiveId" clId="{B781FB94-6E4B-437E-8219-F7473AA9D3A4}" dt="2026-03-26T02:31:16.862" v="0" actId="47"/>
+        <pc:sldMkLst>
+          <pc:docMk/>
+          <pc:sldMk cId="0" sldId="257"/>
+        </pc:sldMkLst>
+      </pc:sldChg>
+      <pc:sldChg chg="del">
+        <pc:chgData name="Manisha Gupta" userId="f44a8969790790db" providerId="LiveId" clId="{B781FB94-6E4B-437E-8219-F7473AA9D3A4}" dt="2026-03-26T02:31:19.902" v="1" actId="47"/>
+        <pc:sldMkLst>
+          <pc:docMk/>
+          <pc:sldMk cId="0" sldId="258"/>
+        </pc:sldMkLst>
+      </pc:sldChg>
+      <pc:sldChg chg="delSp modSp mod">
+        <pc:chgData name="Manisha Gupta" userId="f44a8969790790db" providerId="LiveId" clId="{B781FB94-6E4B-437E-8219-F7473AA9D3A4}" dt="2026-03-26T02:44:22.311" v="8" actId="20577"/>
+        <pc:sldMkLst>
+          <pc:docMk/>
+          <pc:sldMk cId="0" sldId="261"/>
+        </pc:sldMkLst>
+        <pc:spChg chg="del">
+          <ac:chgData name="Manisha Gupta" userId="f44a8969790790db" providerId="LiveId" clId="{B781FB94-6E4B-437E-8219-F7473AA9D3A4}" dt="2026-03-26T02:44:15.046" v="2" actId="478"/>
+          <ac:spMkLst>
+            <pc:docMk/>
+            <pc:sldMk cId="0" sldId="261"/>
+            <ac:spMk id="5" creationId="{00000000-0000-0000-0000-000000000000}"/>
+          </ac:spMkLst>
+        </pc:spChg>
+        <pc:spChg chg="mod">
+          <ac:chgData name="Manisha Gupta" userId="f44a8969790790db" providerId="LiveId" clId="{B781FB94-6E4B-437E-8219-F7473AA9D3A4}" dt="2026-03-26T02:44:22.311" v="8" actId="20577"/>
+          <ac:spMkLst>
+            <pc:docMk/>
+            <pc:sldMk cId="0" sldId="261"/>
+            <ac:spMk id="6" creationId="{00000000-0000-0000-0000-000000000000}"/>
+          </ac:spMkLst>
+        </pc:spChg>
+      </pc:sldChg>
+      <pc:sldChg chg="delSp modSp mod">
+        <pc:chgData name="Manisha Gupta" userId="f44a8969790790db" providerId="LiveId" clId="{B781FB94-6E4B-437E-8219-F7473AA9D3A4}" dt="2026-03-26T02:44:31.065" v="14" actId="20577"/>
+        <pc:sldMkLst>
+          <pc:docMk/>
+          <pc:sldMk cId="0" sldId="263"/>
+        </pc:sldMkLst>
+        <pc:spChg chg="del">
+          <ac:chgData name="Manisha Gupta" userId="f44a8969790790db" providerId="LiveId" clId="{B781FB94-6E4B-437E-8219-F7473AA9D3A4}" dt="2026-03-26T02:44:26.739" v="9" actId="478"/>
+          <ac:spMkLst>
+            <pc:docMk/>
+            <pc:sldMk cId="0" sldId="263"/>
+            <ac:spMk id="5" creationId="{00000000-0000-0000-0000-000000000000}"/>
+          </ac:spMkLst>
+        </pc:spChg>
+        <pc:spChg chg="mod">
+          <ac:chgData name="Manisha Gupta" userId="f44a8969790790db" providerId="LiveId" clId="{B781FB94-6E4B-437E-8219-F7473AA9D3A4}" dt="2026-03-26T02:44:31.065" v="14" actId="20577"/>
+          <ac:spMkLst>
+            <pc:docMk/>
+            <pc:sldMk cId="0" sldId="263"/>
+            <ac:spMk id="6" creationId="{00000000-0000-0000-0000-000000000000}"/>
+          </ac:spMkLst>
+        </pc:spChg>
+      </pc:sldChg>
+    </pc:docChg>
+  </pc:docChgLst>
+</pc:chgInfo>
 </file>
 
 <file path=ppt/notesMasters/notesMaster1.xml><?xml version="1.0" encoding="utf-8"?>
@@ -833,174 +905,6 @@
 </p:notes>
 </file>
 
-<file path=ppt/notesSlides/notesSlide8.xml><?xml version="1.0" encoding="utf-8"?>
-<p:notes xmlns:a="http://schemas.openxmlformats.org/drawingml/2006/main" xmlns:r="http://schemas.openxmlformats.org/officeDocument/2006/relationships" xmlns:p="http://schemas.openxmlformats.org/presentationml/2006/main">
-  <p:cSld>
-    <p:spTree>
-      <p:nvGrpSpPr>
-        <p:cNvPr id="1" name=""/>
-        <p:cNvGrpSpPr/>
-        <p:nvPr/>
-      </p:nvGrpSpPr>
-      <p:grpSpPr>
-        <a:xfrm>
-          <a:off x="0" y="0"/>
-          <a:ext cx="0" cy="0"/>
-          <a:chOff x="0" y="0"/>
-          <a:chExt cx="0" cy="0"/>
-        </a:xfrm>
-      </p:grpSpPr>
-      <p:sp>
-        <p:nvSpPr>
-          <p:cNvPr id="2" name="Slide Image Placeholder 1"/>
-          <p:cNvSpPr>
-            <a:spLocks noGrp="1" noRot="1" noChangeAspect="1"/>
-          </p:cNvSpPr>
-          <p:nvPr>
-            <p:ph type="sldImg"/>
-          </p:nvPr>
-        </p:nvSpPr>
-        <p:spPr/>
-      </p:sp>
-      <p:sp>
-        <p:nvSpPr>
-          <p:cNvPr id="3" name="Notes Placeholder 2"/>
-          <p:cNvSpPr>
-            <a:spLocks noGrp="1"/>
-          </p:cNvSpPr>
-          <p:nvPr>
-            <p:ph type="body" idx="1"/>
-          </p:nvPr>
-        </p:nvSpPr>
-        <p:spPr/>
-        <p:txBody>
-          <a:bodyPr/>
-          <a:lstStyle/>
-          <a:p>
-            <a:endParaRPr lang="en-US" dirty="0"/>
-          </a:p>
-        </p:txBody>
-      </p:sp>
-      <p:sp>
-        <p:nvSpPr>
-          <p:cNvPr id="4" name="Slide Number Placeholder 3"/>
-          <p:cNvSpPr>
-            <a:spLocks noGrp="1"/>
-          </p:cNvSpPr>
-          <p:nvPr>
-            <p:ph type="sldNum" sz="quarter" idx="10"/>
-          </p:nvPr>
-        </p:nvSpPr>
-        <p:spPr/>
-        <p:txBody>
-          <a:bodyPr/>
-          <a:lstStyle/>
-          <a:p>
-            <a:fld id="{F7021451-1387-4CA6-816F-3879F97B5CBC}" type="slidenum">
-              <a:rPr lang="en-US"/>
-              <a:t>8</a:t>
-            </a:fld>
-            <a:endParaRPr lang="en-US"/>
-          </a:p>
-        </p:txBody>
-      </p:sp>
-    </p:spTree>
-    <p:extLst>
-      <p:ext uri="{BB962C8B-B14F-4D97-AF65-F5344CB8AC3E}">
-        <p14:creationId xmlns:p14="http://schemas.microsoft.com/office/powerpoint/2010/main" val="1024086991"/>
-      </p:ext>
-    </p:extLst>
-  </p:cSld>
-  <p:clrMapOvr>
-    <a:masterClrMapping/>
-  </p:clrMapOvr>
-</p:notes>
-</file>
-
-<file path=ppt/notesSlides/notesSlide9.xml><?xml version="1.0" encoding="utf-8"?>
-<p:notes xmlns:a="http://schemas.openxmlformats.org/drawingml/2006/main" xmlns:r="http://schemas.openxmlformats.org/officeDocument/2006/relationships" xmlns:p="http://schemas.openxmlformats.org/presentationml/2006/main">
-  <p:cSld>
-    <p:spTree>
-      <p:nvGrpSpPr>
-        <p:cNvPr id="1" name=""/>
-        <p:cNvGrpSpPr/>
-        <p:nvPr/>
-      </p:nvGrpSpPr>
-      <p:grpSpPr>
-        <a:xfrm>
-          <a:off x="0" y="0"/>
-          <a:ext cx="0" cy="0"/>
-          <a:chOff x="0" y="0"/>
-          <a:chExt cx="0" cy="0"/>
-        </a:xfrm>
-      </p:grpSpPr>
-      <p:sp>
-        <p:nvSpPr>
-          <p:cNvPr id="2" name="Slide Image Placeholder 1"/>
-          <p:cNvSpPr>
-            <a:spLocks noGrp="1" noRot="1" noChangeAspect="1"/>
-          </p:cNvSpPr>
-          <p:nvPr>
-            <p:ph type="sldImg"/>
-          </p:nvPr>
-        </p:nvSpPr>
-        <p:spPr/>
-      </p:sp>
-      <p:sp>
-        <p:nvSpPr>
-          <p:cNvPr id="3" name="Notes Placeholder 2"/>
-          <p:cNvSpPr>
-            <a:spLocks noGrp="1"/>
-          </p:cNvSpPr>
-          <p:nvPr>
-            <p:ph type="body" idx="1"/>
-          </p:nvPr>
-        </p:nvSpPr>
-        <p:spPr/>
-        <p:txBody>
-          <a:bodyPr/>
-          <a:lstStyle/>
-          <a:p>
-            <a:endParaRPr lang="en-US" dirty="0"/>
-          </a:p>
-        </p:txBody>
-      </p:sp>
-      <p:sp>
-        <p:nvSpPr>
-          <p:cNvPr id="4" name="Slide Number Placeholder 3"/>
-          <p:cNvSpPr>
-            <a:spLocks noGrp="1"/>
-          </p:cNvSpPr>
-          <p:nvPr>
-            <p:ph type="sldNum" sz="quarter" idx="10"/>
-          </p:nvPr>
-        </p:nvSpPr>
-        <p:spPr/>
-        <p:txBody>
-          <a:bodyPr/>
-          <a:lstStyle/>
-          <a:p>
-            <a:fld id="{F7021451-1387-4CA6-816F-3879F97B5CBC}" type="slidenum">
-              <a:rPr lang="en-US"/>
-              <a:t>9</a:t>
-            </a:fld>
-            <a:endParaRPr lang="en-US"/>
-          </a:p>
-        </p:txBody>
-      </p:sp>
-    </p:spTree>
-    <p:extLst>
-      <p:ext uri="{BB962C8B-B14F-4D97-AF65-F5344CB8AC3E}">
-        <p14:creationId xmlns:p14="http://schemas.microsoft.com/office/powerpoint/2010/main" val="1024086991"/>
-      </p:ext>
-    </p:extLst>
-  </p:cSld>
-  <p:clrMapOvr>
-    <a:masterClrMapping/>
-  </p:clrMapOvr>
-</p:notes>
-</file>
-
 <file path=ppt/slideLayouts/slideLayout1.xml><?xml version="1.0" encoding="utf-8"?>
 <p:sldLayout xmlns:a="http://schemas.openxmlformats.org/drawingml/2006/main" xmlns:r="http://schemas.openxmlformats.org/officeDocument/2006/relationships" xmlns:p="http://schemas.openxmlformats.org/presentationml/2006/main" preserve="1">
   <p:cSld name="DEFAULT">
@@ -1703,1619 +1607,6 @@
 
 <file path=ppt/slides/slide2.xml><?xml version="1.0" encoding="utf-8"?>
 <p:sld xmlns:a="http://schemas.openxmlformats.org/drawingml/2006/main" xmlns:r="http://schemas.openxmlformats.org/officeDocument/2006/relationships" xmlns:p="http://schemas.openxmlformats.org/presentationml/2006/main">
-  <p:cSld name="Slide 2">
-    <p:bg>
-      <p:bgPr>
-        <a:solidFill>
-          <a:srgbClr val="F0F4F8"/>
-        </a:solidFill>
-        <a:effectLst/>
-      </p:bgPr>
-    </p:bg>
-    <p:spTree>
-      <p:nvGrpSpPr>
-        <p:cNvPr id="1" name=""/>
-        <p:cNvGrpSpPr/>
-        <p:nvPr/>
-      </p:nvGrpSpPr>
-      <p:grpSpPr>
-        <a:xfrm>
-          <a:off x="0" y="0"/>
-          <a:ext cx="0" cy="0"/>
-          <a:chOff x="0" y="0"/>
-          <a:chExt cx="0" cy="0"/>
-        </a:xfrm>
-      </p:grpSpPr>
-      <p:sp>
-        <p:nvSpPr>
-          <p:cNvPr id="2" name="Shape 0"/>
-          <p:cNvSpPr/>
-          <p:nvPr/>
-        </p:nvSpPr>
-        <p:spPr>
-          <a:xfrm>
-            <a:off x="0" y="0"/>
-            <a:ext cx="2560320" cy="5143500"/>
-          </a:xfrm>
-          <a:prstGeom prst="rect">
-            <a:avLst/>
-          </a:prstGeom>
-          <a:solidFill>
-            <a:srgbClr val="0D1B2A"/>
-          </a:solidFill>
-          <a:ln w="12700">
-            <a:solidFill>
-              <a:srgbClr val="0D1B2A"/>
-            </a:solidFill>
-            <a:prstDash val="solid"/>
-          </a:ln>
-        </p:spPr>
-        <p:txBody>
-          <a:bodyPr/>
-          <a:lstStyle/>
-          <a:p>
-            <a:endParaRPr lang="en-US"/>
-          </a:p>
-        </p:txBody>
-      </p:sp>
-      <p:sp>
-        <p:nvSpPr>
-          <p:cNvPr id="3" name="Text 1"/>
-          <p:cNvSpPr/>
-          <p:nvPr/>
-        </p:nvSpPr>
-        <p:spPr>
-          <a:xfrm>
-            <a:off x="91440" y="2011680"/>
-            <a:ext cx="2377440" cy="914400"/>
-          </a:xfrm>
-          <a:prstGeom prst="rect">
-            <a:avLst/>
-          </a:prstGeom>
-          <a:noFill/>
-          <a:ln/>
-        </p:spPr>
-        <p:txBody>
-          <a:bodyPr wrap="square" lIns="0" tIns="0" rIns="0" bIns="0" rtlCol="0" anchor="ctr"/>
-          <a:lstStyle/>
-          <a:p>
-            <a:pPr marL="0" indent="0" algn="ctr">
-              <a:buNone/>
-            </a:pPr>
-            <a:r>
-              <a:rPr lang="en-US" sz="2800" b="1" dirty="0">
-                <a:solidFill>
-                  <a:srgbClr val="FFFFFF"/>
-                </a:solidFill>
-                <a:latin typeface="Trebuchet MS" pitchFamily="34" charset="0"/>
-                <a:ea typeface="Trebuchet MS" pitchFamily="34" charset="-122"/>
-                <a:cs typeface="Trebuchet MS" pitchFamily="34" charset="-120"/>
-              </a:rPr>
-              <a:t>AGENDA</a:t>
-            </a:r>
-            <a:endParaRPr lang="en-US" sz="2800" dirty="0"/>
-          </a:p>
-        </p:txBody>
-      </p:sp>
-      <p:sp>
-        <p:nvSpPr>
-          <p:cNvPr id="4" name="Text 2"/>
-          <p:cNvSpPr/>
-          <p:nvPr/>
-        </p:nvSpPr>
-        <p:spPr>
-          <a:xfrm>
-            <a:off x="91440" y="2926080"/>
-            <a:ext cx="2377440" cy="365760"/>
-          </a:xfrm>
-          <a:prstGeom prst="rect">
-            <a:avLst/>
-          </a:prstGeom>
-          <a:noFill/>
-          <a:ln/>
-        </p:spPr>
-        <p:txBody>
-          <a:bodyPr wrap="square" lIns="0" tIns="0" rIns="0" bIns="0" rtlCol="0" anchor="ctr"/>
-          <a:lstStyle/>
-          <a:p>
-            <a:pPr marL="0" indent="0" algn="ctr">
-              <a:buNone/>
-            </a:pPr>
-            <a:r>
-              <a:rPr lang="en-US" sz="1100" i="1" dirty="0">
-                <a:solidFill>
-                  <a:srgbClr val="00B4D8"/>
-                </a:solidFill>
-                <a:latin typeface="Calibri" pitchFamily="34" charset="0"/>
-                <a:ea typeface="Calibri" pitchFamily="34" charset="-122"/>
-                <a:cs typeface="Calibri" pitchFamily="34" charset="-120"/>
-              </a:rPr>
-              <a:t>Today's Highlights</a:t>
-            </a:r>
-            <a:endParaRPr lang="en-US" sz="1100" dirty="0"/>
-          </a:p>
-        </p:txBody>
-      </p:sp>
-      <p:sp>
-        <p:nvSpPr>
-          <p:cNvPr id="5" name="Shape 3"/>
-          <p:cNvSpPr/>
-          <p:nvPr/>
-        </p:nvSpPr>
-        <p:spPr>
-          <a:xfrm>
-            <a:off x="2834640" y="502920"/>
-            <a:ext cx="5943600" cy="1234440"/>
-          </a:xfrm>
-          <a:prstGeom prst="rect">
-            <a:avLst/>
-          </a:prstGeom>
-          <a:solidFill>
-            <a:srgbClr val="FFFFFF"/>
-          </a:solidFill>
-          <a:ln w="12700">
-            <a:solidFill>
-              <a:srgbClr val="FFFFFF"/>
-            </a:solidFill>
-            <a:prstDash val="solid"/>
-          </a:ln>
-          <a:effectLst>
-            <a:outerShdw blurRad="101600" dist="25400" dir="8100000" algn="bl" rotWithShape="0">
-              <a:srgbClr val="000000">
-                <a:alpha val="8000"/>
-              </a:srgbClr>
-            </a:outerShdw>
-          </a:effectLst>
-        </p:spPr>
-        <p:txBody>
-          <a:bodyPr/>
-          <a:lstStyle/>
-          <a:p>
-            <a:endParaRPr lang="en-US"/>
-          </a:p>
-        </p:txBody>
-      </p:sp>
-      <p:sp>
-        <p:nvSpPr>
-          <p:cNvPr id="6" name="Shape 4"/>
-          <p:cNvSpPr/>
-          <p:nvPr/>
-        </p:nvSpPr>
-        <p:spPr>
-          <a:xfrm>
-            <a:off x="2834640" y="502920"/>
-            <a:ext cx="73152" cy="1234440"/>
-          </a:xfrm>
-          <a:prstGeom prst="rect">
-            <a:avLst/>
-          </a:prstGeom>
-          <a:solidFill>
-            <a:srgbClr val="00B4D8"/>
-          </a:solidFill>
-          <a:ln w="12700">
-            <a:solidFill>
-              <a:srgbClr val="00B4D8"/>
-            </a:solidFill>
-            <a:prstDash val="solid"/>
-          </a:ln>
-        </p:spPr>
-        <p:txBody>
-          <a:bodyPr/>
-          <a:lstStyle/>
-          <a:p>
-            <a:endParaRPr lang="en-US"/>
-          </a:p>
-        </p:txBody>
-      </p:sp>
-      <p:sp>
-        <p:nvSpPr>
-          <p:cNvPr id="7" name="Text 5"/>
-          <p:cNvSpPr/>
-          <p:nvPr/>
-        </p:nvSpPr>
-        <p:spPr>
-          <a:xfrm>
-            <a:off x="3017520" y="640080"/>
-            <a:ext cx="640080" cy="502920"/>
-          </a:xfrm>
-          <a:prstGeom prst="rect">
-            <a:avLst/>
-          </a:prstGeom>
-          <a:noFill/>
-          <a:ln/>
-        </p:spPr>
-        <p:txBody>
-          <a:bodyPr wrap="square" lIns="0" tIns="0" rIns="0" bIns="0" rtlCol="0" anchor="ctr"/>
-          <a:lstStyle/>
-          <a:p>
-            <a:pPr marL="0" indent="0" algn="l">
-              <a:buNone/>
-            </a:pPr>
-            <a:r>
-              <a:rPr lang="en-US" sz="2800" b="1" dirty="0">
-                <a:solidFill>
-                  <a:srgbClr val="00B4D8"/>
-                </a:solidFill>
-                <a:latin typeface="Trebuchet MS" pitchFamily="34" charset="0"/>
-                <a:ea typeface="Trebuchet MS" pitchFamily="34" charset="-122"/>
-                <a:cs typeface="Trebuchet MS" pitchFamily="34" charset="-120"/>
-              </a:rPr>
-              <a:t>01</a:t>
-            </a:r>
-            <a:endParaRPr lang="en-US" sz="2800" dirty="0"/>
-          </a:p>
-        </p:txBody>
-      </p:sp>
-      <p:sp>
-        <p:nvSpPr>
-          <p:cNvPr id="8" name="Text 6"/>
-          <p:cNvSpPr/>
-          <p:nvPr/>
-        </p:nvSpPr>
-        <p:spPr>
-          <a:xfrm>
-            <a:off x="3749040" y="667512"/>
-            <a:ext cx="4754880" cy="411480"/>
-          </a:xfrm>
-          <a:prstGeom prst="rect">
-            <a:avLst/>
-          </a:prstGeom>
-          <a:noFill/>
-          <a:ln/>
-        </p:spPr>
-        <p:txBody>
-          <a:bodyPr wrap="square" lIns="0" tIns="0" rIns="0" bIns="0" rtlCol="0" anchor="ctr"/>
-          <a:lstStyle/>
-          <a:p>
-            <a:pPr marL="0" indent="0" algn="l">
-              <a:buNone/>
-            </a:pPr>
-            <a:r>
-              <a:rPr lang="en-US" sz="1800" b="1" dirty="0">
-                <a:solidFill>
-                  <a:srgbClr val="0D1B2A"/>
-                </a:solidFill>
-                <a:latin typeface="Trebuchet MS" pitchFamily="34" charset="0"/>
-                <a:ea typeface="Trebuchet MS" pitchFamily="34" charset="-122"/>
-                <a:cs typeface="Trebuchet MS" pitchFamily="34" charset="-120"/>
-              </a:rPr>
-              <a:t>Cohort Goals</a:t>
-            </a:r>
-            <a:endParaRPr lang="en-US" sz="1800" dirty="0"/>
-          </a:p>
-        </p:txBody>
-      </p:sp>
-      <p:sp>
-        <p:nvSpPr>
-          <p:cNvPr id="9" name="Text 7"/>
-          <p:cNvSpPr/>
-          <p:nvPr/>
-        </p:nvSpPr>
-        <p:spPr>
-          <a:xfrm>
-            <a:off x="3749040" y="1124712"/>
-            <a:ext cx="4754880" cy="320040"/>
-          </a:xfrm>
-          <a:prstGeom prst="rect">
-            <a:avLst/>
-          </a:prstGeom>
-          <a:noFill/>
-          <a:ln/>
-        </p:spPr>
-        <p:txBody>
-          <a:bodyPr wrap="square" lIns="0" tIns="0" rIns="0" bIns="0" rtlCol="0" anchor="ctr"/>
-          <a:lstStyle/>
-          <a:p>
-            <a:pPr marL="0" indent="0" algn="l">
-              <a:buNone/>
-            </a:pPr>
-            <a:r>
-              <a:rPr lang="en-US" sz="1200" dirty="0">
-                <a:solidFill>
-                  <a:srgbClr val="8899AA"/>
-                </a:solidFill>
-                <a:latin typeface="Calibri" pitchFamily="34" charset="0"/>
-                <a:ea typeface="Calibri" pitchFamily="34" charset="-122"/>
-                <a:cs typeface="Calibri" pitchFamily="34" charset="-120"/>
-              </a:rPr>
-              <a:t>Learning objectives &amp; 6-month roadmap</a:t>
-            </a:r>
-            <a:endParaRPr lang="en-US" sz="1200" dirty="0"/>
-          </a:p>
-        </p:txBody>
-      </p:sp>
-      <p:sp>
-        <p:nvSpPr>
-          <p:cNvPr id="10" name="Shape 8"/>
-          <p:cNvSpPr/>
-          <p:nvPr/>
-        </p:nvSpPr>
-        <p:spPr>
-          <a:xfrm>
-            <a:off x="2834640" y="1920240"/>
-            <a:ext cx="5943600" cy="1234440"/>
-          </a:xfrm>
-          <a:prstGeom prst="rect">
-            <a:avLst/>
-          </a:prstGeom>
-          <a:solidFill>
-            <a:srgbClr val="FFFFFF"/>
-          </a:solidFill>
-          <a:ln w="12700">
-            <a:solidFill>
-              <a:srgbClr val="FFFFFF"/>
-            </a:solidFill>
-            <a:prstDash val="solid"/>
-          </a:ln>
-          <a:effectLst>
-            <a:outerShdw blurRad="101600" dist="25400" dir="8100000" algn="bl" rotWithShape="0">
-              <a:srgbClr val="000000">
-                <a:alpha val="8000"/>
-              </a:srgbClr>
-            </a:outerShdw>
-          </a:effectLst>
-        </p:spPr>
-        <p:txBody>
-          <a:bodyPr/>
-          <a:lstStyle/>
-          <a:p>
-            <a:endParaRPr lang="en-US"/>
-          </a:p>
-        </p:txBody>
-      </p:sp>
-      <p:sp>
-        <p:nvSpPr>
-          <p:cNvPr id="11" name="Shape 9"/>
-          <p:cNvSpPr/>
-          <p:nvPr/>
-        </p:nvSpPr>
-        <p:spPr>
-          <a:xfrm>
-            <a:off x="2834640" y="1920240"/>
-            <a:ext cx="73152" cy="1234440"/>
-          </a:xfrm>
-          <a:prstGeom prst="rect">
-            <a:avLst/>
-          </a:prstGeom>
-          <a:solidFill>
-            <a:srgbClr val="00B4D8"/>
-          </a:solidFill>
-          <a:ln w="12700">
-            <a:solidFill>
-              <a:srgbClr val="00B4D8"/>
-            </a:solidFill>
-            <a:prstDash val="solid"/>
-          </a:ln>
-        </p:spPr>
-        <p:txBody>
-          <a:bodyPr/>
-          <a:lstStyle/>
-          <a:p>
-            <a:endParaRPr lang="en-US"/>
-          </a:p>
-        </p:txBody>
-      </p:sp>
-      <p:sp>
-        <p:nvSpPr>
-          <p:cNvPr id="12" name="Text 10"/>
-          <p:cNvSpPr/>
-          <p:nvPr/>
-        </p:nvSpPr>
-        <p:spPr>
-          <a:xfrm>
-            <a:off x="3017520" y="2057400"/>
-            <a:ext cx="640080" cy="502920"/>
-          </a:xfrm>
-          <a:prstGeom prst="rect">
-            <a:avLst/>
-          </a:prstGeom>
-          <a:noFill/>
-          <a:ln/>
-        </p:spPr>
-        <p:txBody>
-          <a:bodyPr wrap="square" lIns="0" tIns="0" rIns="0" bIns="0" rtlCol="0" anchor="ctr"/>
-          <a:lstStyle/>
-          <a:p>
-            <a:pPr marL="0" indent="0" algn="l">
-              <a:buNone/>
-            </a:pPr>
-            <a:r>
-              <a:rPr lang="en-US" sz="2800" b="1" dirty="0">
-                <a:solidFill>
-                  <a:srgbClr val="00B4D8"/>
-                </a:solidFill>
-                <a:latin typeface="Trebuchet MS" pitchFamily="34" charset="0"/>
-                <a:ea typeface="Trebuchet MS" pitchFamily="34" charset="-122"/>
-                <a:cs typeface="Trebuchet MS" pitchFamily="34" charset="-120"/>
-              </a:rPr>
-              <a:t>02</a:t>
-            </a:r>
-            <a:endParaRPr lang="en-US" sz="2800" dirty="0"/>
-          </a:p>
-        </p:txBody>
-      </p:sp>
-      <p:sp>
-        <p:nvSpPr>
-          <p:cNvPr id="13" name="Text 11"/>
-          <p:cNvSpPr/>
-          <p:nvPr/>
-        </p:nvSpPr>
-        <p:spPr>
-          <a:xfrm>
-            <a:off x="3749040" y="2084832"/>
-            <a:ext cx="4754880" cy="411480"/>
-          </a:xfrm>
-          <a:prstGeom prst="rect">
-            <a:avLst/>
-          </a:prstGeom>
-          <a:noFill/>
-          <a:ln/>
-        </p:spPr>
-        <p:txBody>
-          <a:bodyPr wrap="square" lIns="0" tIns="0" rIns="0" bIns="0" rtlCol="0" anchor="ctr"/>
-          <a:lstStyle/>
-          <a:p>
-            <a:pPr marL="0" indent="0" algn="l">
-              <a:buNone/>
-            </a:pPr>
-            <a:r>
-              <a:rPr lang="en-US" sz="1800" b="1" dirty="0">
-                <a:solidFill>
-                  <a:srgbClr val="0D1B2A"/>
-                </a:solidFill>
-                <a:latin typeface="Trebuchet MS" pitchFamily="34" charset="0"/>
-                <a:ea typeface="Trebuchet MS" pitchFamily="34" charset="-122"/>
-                <a:cs typeface="Trebuchet MS" pitchFamily="34" charset="-120"/>
-              </a:rPr>
-              <a:t>GoFit Application</a:t>
-            </a:r>
-            <a:endParaRPr lang="en-US" sz="1800" dirty="0"/>
-          </a:p>
-        </p:txBody>
-      </p:sp>
-      <p:sp>
-        <p:nvSpPr>
-          <p:cNvPr id="14" name="Text 12"/>
-          <p:cNvSpPr/>
-          <p:nvPr/>
-        </p:nvSpPr>
-        <p:spPr>
-          <a:xfrm>
-            <a:off x="3749040" y="2542032"/>
-            <a:ext cx="4754880" cy="320040"/>
-          </a:xfrm>
-          <a:prstGeom prst="rect">
-            <a:avLst/>
-          </a:prstGeom>
-          <a:noFill/>
-          <a:ln/>
-        </p:spPr>
-        <p:txBody>
-          <a:bodyPr wrap="square" lIns="0" tIns="0" rIns="0" bIns="0" rtlCol="0" anchor="ctr"/>
-          <a:lstStyle/>
-          <a:p>
-            <a:pPr marL="0" indent="0" algn="l">
-              <a:buNone/>
-            </a:pPr>
-            <a:r>
-              <a:rPr lang="en-US" sz="1200" dirty="0">
-                <a:solidFill>
-                  <a:srgbClr val="8899AA"/>
-                </a:solidFill>
-                <a:latin typeface="Calibri" pitchFamily="34" charset="0"/>
-                <a:ea typeface="Calibri" pitchFamily="34" charset="-122"/>
-                <a:cs typeface="Calibri" pitchFamily="34" charset="-120"/>
-              </a:rPr>
-              <a:t>Python-powered personalized fitness planner</a:t>
-            </a:r>
-            <a:endParaRPr lang="en-US" sz="1200" dirty="0"/>
-          </a:p>
-        </p:txBody>
-      </p:sp>
-      <p:sp>
-        <p:nvSpPr>
-          <p:cNvPr id="15" name="Shape 13"/>
-          <p:cNvSpPr/>
-          <p:nvPr/>
-        </p:nvSpPr>
-        <p:spPr>
-          <a:xfrm>
-            <a:off x="2834640" y="3337560"/>
-            <a:ext cx="5943600" cy="1234440"/>
-          </a:xfrm>
-          <a:prstGeom prst="rect">
-            <a:avLst/>
-          </a:prstGeom>
-          <a:solidFill>
-            <a:srgbClr val="FFFFFF"/>
-          </a:solidFill>
-          <a:ln w="12700">
-            <a:solidFill>
-              <a:srgbClr val="FFFFFF"/>
-            </a:solidFill>
-            <a:prstDash val="solid"/>
-          </a:ln>
-          <a:effectLst>
-            <a:outerShdw blurRad="101600" dist="25400" dir="8100000" algn="bl" rotWithShape="0">
-              <a:srgbClr val="000000">
-                <a:alpha val="8000"/>
-              </a:srgbClr>
-            </a:outerShdw>
-          </a:effectLst>
-        </p:spPr>
-        <p:txBody>
-          <a:bodyPr/>
-          <a:lstStyle/>
-          <a:p>
-            <a:endParaRPr lang="en-US"/>
-          </a:p>
-        </p:txBody>
-      </p:sp>
-      <p:sp>
-        <p:nvSpPr>
-          <p:cNvPr id="16" name="Shape 14"/>
-          <p:cNvSpPr/>
-          <p:nvPr/>
-        </p:nvSpPr>
-        <p:spPr>
-          <a:xfrm>
-            <a:off x="2834640" y="3337560"/>
-            <a:ext cx="73152" cy="1234440"/>
-          </a:xfrm>
-          <a:prstGeom prst="rect">
-            <a:avLst/>
-          </a:prstGeom>
-          <a:solidFill>
-            <a:srgbClr val="00B4D8"/>
-          </a:solidFill>
-          <a:ln w="12700">
-            <a:solidFill>
-              <a:srgbClr val="00B4D8"/>
-            </a:solidFill>
-            <a:prstDash val="solid"/>
-          </a:ln>
-        </p:spPr>
-        <p:txBody>
-          <a:bodyPr/>
-          <a:lstStyle/>
-          <a:p>
-            <a:endParaRPr lang="en-US"/>
-          </a:p>
-        </p:txBody>
-      </p:sp>
-      <p:sp>
-        <p:nvSpPr>
-          <p:cNvPr id="17" name="Text 15"/>
-          <p:cNvSpPr/>
-          <p:nvPr/>
-        </p:nvSpPr>
-        <p:spPr>
-          <a:xfrm>
-            <a:off x="3017520" y="3474720"/>
-            <a:ext cx="640080" cy="502920"/>
-          </a:xfrm>
-          <a:prstGeom prst="rect">
-            <a:avLst/>
-          </a:prstGeom>
-          <a:noFill/>
-          <a:ln/>
-        </p:spPr>
-        <p:txBody>
-          <a:bodyPr wrap="square" lIns="0" tIns="0" rIns="0" bIns="0" rtlCol="0" anchor="ctr"/>
-          <a:lstStyle/>
-          <a:p>
-            <a:pPr marL="0" indent="0" algn="l">
-              <a:buNone/>
-            </a:pPr>
-            <a:r>
-              <a:rPr lang="en-US" sz="2800" b="1" dirty="0">
-                <a:solidFill>
-                  <a:srgbClr val="00B4D8"/>
-                </a:solidFill>
-                <a:latin typeface="Trebuchet MS" pitchFamily="34" charset="0"/>
-                <a:ea typeface="Trebuchet MS" pitchFamily="34" charset="-122"/>
-                <a:cs typeface="Trebuchet MS" pitchFamily="34" charset="-120"/>
-              </a:rPr>
-              <a:t>03</a:t>
-            </a:r>
-            <a:endParaRPr lang="en-US" sz="2800" dirty="0"/>
-          </a:p>
-        </p:txBody>
-      </p:sp>
-      <p:sp>
-        <p:nvSpPr>
-          <p:cNvPr id="18" name="Text 16"/>
-          <p:cNvSpPr/>
-          <p:nvPr/>
-        </p:nvSpPr>
-        <p:spPr>
-          <a:xfrm>
-            <a:off x="3749040" y="3502152"/>
-            <a:ext cx="4754880" cy="411480"/>
-          </a:xfrm>
-          <a:prstGeom prst="rect">
-            <a:avLst/>
-          </a:prstGeom>
-          <a:noFill/>
-          <a:ln/>
-        </p:spPr>
-        <p:txBody>
-          <a:bodyPr wrap="square" lIns="0" tIns="0" rIns="0" bIns="0" rtlCol="0" anchor="ctr"/>
-          <a:lstStyle/>
-          <a:p>
-            <a:pPr marL="0" indent="0" algn="l">
-              <a:buNone/>
-            </a:pPr>
-            <a:r>
-              <a:rPr lang="en-US" sz="1800" b="1" dirty="0">
-                <a:solidFill>
-                  <a:srgbClr val="0D1B2A"/>
-                </a:solidFill>
-                <a:latin typeface="Trebuchet MS" pitchFamily="34" charset="0"/>
-                <a:ea typeface="Trebuchet MS" pitchFamily="34" charset="-122"/>
-                <a:cs typeface="Trebuchet MS" pitchFamily="34" charset="-120"/>
-              </a:rPr>
-              <a:t>EISP Project</a:t>
-            </a:r>
-            <a:endParaRPr lang="en-US" sz="1800" dirty="0"/>
-          </a:p>
-        </p:txBody>
-      </p:sp>
-      <p:sp>
-        <p:nvSpPr>
-          <p:cNvPr id="19" name="Text 17"/>
-          <p:cNvSpPr/>
-          <p:nvPr/>
-        </p:nvSpPr>
-        <p:spPr>
-          <a:xfrm>
-            <a:off x="3749040" y="3959352"/>
-            <a:ext cx="4754880" cy="320040"/>
-          </a:xfrm>
-          <a:prstGeom prst="rect">
-            <a:avLst/>
-          </a:prstGeom>
-          <a:noFill/>
-          <a:ln/>
-        </p:spPr>
-        <p:txBody>
-          <a:bodyPr wrap="square" lIns="0" tIns="0" rIns="0" bIns="0" rtlCol="0" anchor="ctr"/>
-          <a:lstStyle/>
-          <a:p>
-            <a:pPr marL="0" indent="0" algn="l">
-              <a:buNone/>
-            </a:pPr>
-            <a:r>
-              <a:rPr lang="en-US" sz="1200" dirty="0">
-                <a:solidFill>
-                  <a:srgbClr val="8899AA"/>
-                </a:solidFill>
-                <a:latin typeface="Calibri" pitchFamily="34" charset="0"/>
-                <a:ea typeface="Calibri" pitchFamily="34" charset="-122"/>
-                <a:cs typeface="Calibri" pitchFamily="34" charset="-120"/>
-              </a:rPr>
-              <a:t>Enterprise Identity Security Platform design</a:t>
-            </a:r>
-            <a:endParaRPr lang="en-US" sz="1200" dirty="0"/>
-          </a:p>
-        </p:txBody>
-      </p:sp>
-    </p:spTree>
-  </p:cSld>
-  <p:clrMapOvr>
-    <a:masterClrMapping/>
-  </p:clrMapOvr>
-</p:sld>
-</file>
-
-<file path=ppt/slides/slide3.xml><?xml version="1.0" encoding="utf-8"?>
-<p:sld xmlns:a="http://schemas.openxmlformats.org/drawingml/2006/main" xmlns:r="http://schemas.openxmlformats.org/officeDocument/2006/relationships" xmlns:p="http://schemas.openxmlformats.org/presentationml/2006/main">
-  <p:cSld name="Slide 3">
-    <p:bg>
-      <p:bgPr>
-        <a:solidFill>
-          <a:srgbClr val="0D1B2A"/>
-        </a:solidFill>
-        <a:effectLst/>
-      </p:bgPr>
-    </p:bg>
-    <p:spTree>
-      <p:nvGrpSpPr>
-        <p:cNvPr id="1" name=""/>
-        <p:cNvGrpSpPr/>
-        <p:nvPr/>
-      </p:nvGrpSpPr>
-      <p:grpSpPr>
-        <a:xfrm>
-          <a:off x="0" y="0"/>
-          <a:ext cx="0" cy="0"/>
-          <a:chOff x="0" y="0"/>
-          <a:chExt cx="0" cy="0"/>
-        </a:xfrm>
-      </p:grpSpPr>
-      <p:sp>
-        <p:nvSpPr>
-          <p:cNvPr id="2" name="Shape 0"/>
-          <p:cNvSpPr/>
-          <p:nvPr/>
-        </p:nvSpPr>
-        <p:spPr>
-          <a:xfrm>
-            <a:off x="0" y="0"/>
-            <a:ext cx="9144000" cy="1051560"/>
-          </a:xfrm>
-          <a:prstGeom prst="rect">
-            <a:avLst/>
-          </a:prstGeom>
-          <a:solidFill>
-            <a:srgbClr val="1A2E42"/>
-          </a:solidFill>
-          <a:ln w="12700">
-            <a:solidFill>
-              <a:srgbClr val="1A2E42"/>
-            </a:solidFill>
-            <a:prstDash val="solid"/>
-          </a:ln>
-        </p:spPr>
-        <p:txBody>
-          <a:bodyPr/>
-          <a:lstStyle/>
-          <a:p>
-            <a:endParaRPr lang="en-US"/>
-          </a:p>
-        </p:txBody>
-      </p:sp>
-      <p:sp>
-        <p:nvSpPr>
-          <p:cNvPr id="3" name="Text 1"/>
-          <p:cNvSpPr/>
-          <p:nvPr/>
-        </p:nvSpPr>
-        <p:spPr>
-          <a:xfrm>
-            <a:off x="457200" y="164592"/>
-            <a:ext cx="7315200" cy="640080"/>
-          </a:xfrm>
-          <a:prstGeom prst="rect">
-            <a:avLst/>
-          </a:prstGeom>
-          <a:noFill/>
-          <a:ln/>
-        </p:spPr>
-        <p:txBody>
-          <a:bodyPr wrap="square" lIns="0" tIns="0" rIns="0" bIns="0" rtlCol="0" anchor="ctr"/>
-          <a:lstStyle/>
-          <a:p>
-            <a:pPr marL="0" indent="0" algn="l">
-              <a:buNone/>
-            </a:pPr>
-            <a:r>
-              <a:rPr lang="en-US" sz="3200" b="1" dirty="0">
-                <a:solidFill>
-                  <a:srgbClr val="FFFFFF"/>
-                </a:solidFill>
-                <a:latin typeface="Trebuchet MS" pitchFamily="34" charset="0"/>
-                <a:ea typeface="Trebuchet MS" pitchFamily="34" charset="-122"/>
-                <a:cs typeface="Trebuchet MS" pitchFamily="34" charset="-120"/>
-              </a:rPr>
-              <a:t>6-Month Cohort Goals</a:t>
-            </a:r>
-            <a:endParaRPr lang="en-US" sz="3200" dirty="0"/>
-          </a:p>
-        </p:txBody>
-      </p:sp>
-      <p:sp>
-        <p:nvSpPr>
-          <p:cNvPr id="4" name="Text 2"/>
-          <p:cNvSpPr/>
-          <p:nvPr/>
-        </p:nvSpPr>
-        <p:spPr>
-          <a:xfrm>
-            <a:off x="457200" y="749808"/>
-            <a:ext cx="5486400" cy="256032"/>
-          </a:xfrm>
-          <a:prstGeom prst="rect">
-            <a:avLst/>
-          </a:prstGeom>
-          <a:noFill/>
-          <a:ln/>
-        </p:spPr>
-        <p:txBody>
-          <a:bodyPr wrap="square" lIns="0" tIns="0" rIns="0" bIns="0" rtlCol="0" anchor="ctr"/>
-          <a:lstStyle/>
-          <a:p>
-            <a:pPr marL="0" indent="0" algn="l">
-              <a:buNone/>
-            </a:pPr>
-            <a:r>
-              <a:rPr lang="en-US" sz="1200" i="1" dirty="0">
-                <a:solidFill>
-                  <a:srgbClr val="00B4D8"/>
-                </a:solidFill>
-                <a:latin typeface="Calibri" pitchFamily="34" charset="0"/>
-                <a:ea typeface="Calibri" pitchFamily="34" charset="-122"/>
-                <a:cs typeface="Calibri" pitchFamily="34" charset="-120"/>
-              </a:rPr>
-              <a:t>What I Set Out to Achieve</a:t>
-            </a:r>
-            <a:endParaRPr lang="en-US" sz="1200" dirty="0"/>
-          </a:p>
-        </p:txBody>
-      </p:sp>
-      <p:sp>
-        <p:nvSpPr>
-          <p:cNvPr id="5" name="Shape 3"/>
-          <p:cNvSpPr/>
-          <p:nvPr/>
-        </p:nvSpPr>
-        <p:spPr>
-          <a:xfrm>
-            <a:off x="7772400" y="228600"/>
-            <a:ext cx="1097280" cy="548640"/>
-          </a:xfrm>
-          <a:prstGeom prst="rect">
-            <a:avLst/>
-          </a:prstGeom>
-          <a:solidFill>
-            <a:srgbClr val="00B4D8"/>
-          </a:solidFill>
-          <a:ln w="12700">
-            <a:solidFill>
-              <a:srgbClr val="00B4D8"/>
-            </a:solidFill>
-            <a:prstDash val="solid"/>
-          </a:ln>
-        </p:spPr>
-        <p:txBody>
-          <a:bodyPr/>
-          <a:lstStyle/>
-          <a:p>
-            <a:endParaRPr lang="en-US"/>
-          </a:p>
-        </p:txBody>
-      </p:sp>
-      <p:sp>
-        <p:nvSpPr>
-          <p:cNvPr id="6" name="Text 4"/>
-          <p:cNvSpPr/>
-          <p:nvPr/>
-        </p:nvSpPr>
-        <p:spPr>
-          <a:xfrm>
-            <a:off x="7772400" y="228600"/>
-            <a:ext cx="1097280" cy="548640"/>
-          </a:xfrm>
-          <a:prstGeom prst="rect">
-            <a:avLst/>
-          </a:prstGeom>
-          <a:noFill/>
-          <a:ln/>
-        </p:spPr>
-        <p:txBody>
-          <a:bodyPr wrap="square" lIns="0" tIns="0" rIns="0" bIns="0" rtlCol="0" anchor="ctr"/>
-          <a:lstStyle/>
-          <a:p>
-            <a:pPr marL="0" indent="0" algn="ctr">
-              <a:buNone/>
-            </a:pPr>
-            <a:r>
-              <a:rPr lang="en-US" sz="1300" b="1" dirty="0">
-                <a:solidFill>
-                  <a:srgbClr val="FFFFFF"/>
-                </a:solidFill>
-                <a:latin typeface="Calibri" pitchFamily="34" charset="0"/>
-                <a:ea typeface="Calibri" pitchFamily="34" charset="-122"/>
-                <a:cs typeface="Calibri" pitchFamily="34" charset="-120"/>
-              </a:rPr>
-              <a:t>01 / 03</a:t>
-            </a:r>
-            <a:endParaRPr lang="en-US" sz="1300" dirty="0"/>
-          </a:p>
-        </p:txBody>
-      </p:sp>
-      <p:sp>
-        <p:nvSpPr>
-          <p:cNvPr id="7" name="Shape 5"/>
-          <p:cNvSpPr/>
-          <p:nvPr/>
-        </p:nvSpPr>
-        <p:spPr>
-          <a:xfrm>
-            <a:off x="320040" y="1234440"/>
-            <a:ext cx="4114800" cy="1600200"/>
-          </a:xfrm>
-          <a:prstGeom prst="rect">
-            <a:avLst/>
-          </a:prstGeom>
-          <a:solidFill>
-            <a:srgbClr val="1A2E42"/>
-          </a:solidFill>
-          <a:ln w="12700">
-            <a:solidFill>
-              <a:srgbClr val="1A2E42"/>
-            </a:solidFill>
-            <a:prstDash val="solid"/>
-          </a:ln>
-          <a:effectLst>
-            <a:outerShdw blurRad="127000" dist="38100" dir="8100000" algn="bl" rotWithShape="0">
-              <a:srgbClr val="000000">
-                <a:alpha val="20000"/>
-              </a:srgbClr>
-            </a:outerShdw>
-          </a:effectLst>
-        </p:spPr>
-        <p:txBody>
-          <a:bodyPr/>
-          <a:lstStyle/>
-          <a:p>
-            <a:endParaRPr lang="en-US"/>
-          </a:p>
-        </p:txBody>
-      </p:sp>
-      <p:sp>
-        <p:nvSpPr>
-          <p:cNvPr id="8" name="Shape 6"/>
-          <p:cNvSpPr/>
-          <p:nvPr/>
-        </p:nvSpPr>
-        <p:spPr>
-          <a:xfrm>
-            <a:off x="484632" y="1618488"/>
-            <a:ext cx="502920" cy="502920"/>
-          </a:xfrm>
-          <a:prstGeom prst="ellipse">
-            <a:avLst/>
-          </a:prstGeom>
-          <a:solidFill>
-            <a:srgbClr val="1A2E42"/>
-          </a:solidFill>
-          <a:ln w="12700">
-            <a:solidFill>
-              <a:srgbClr val="1A2E42"/>
-            </a:solidFill>
-            <a:prstDash val="solid"/>
-          </a:ln>
-        </p:spPr>
-        <p:txBody>
-          <a:bodyPr/>
-          <a:lstStyle/>
-          <a:p>
-            <a:endParaRPr lang="en-US"/>
-          </a:p>
-        </p:txBody>
-      </p:sp>
-      <p:pic>
-        <p:nvPicPr>
-          <p:cNvPr id="9" name="Image 0" descr="preencoded.png"/>
-          <p:cNvPicPr>
-            <a:picLocks noChangeAspect="1"/>
-          </p:cNvPicPr>
-          <p:nvPr/>
-        </p:nvPicPr>
-        <p:blipFill>
-          <a:blip r:embed="rId3"/>
-          <a:stretch>
-            <a:fillRect/>
-          </a:stretch>
-        </p:blipFill>
-        <p:spPr>
-          <a:xfrm>
-            <a:off x="512064" y="1645920"/>
-            <a:ext cx="438912" cy="438912"/>
-          </a:xfrm>
-          <a:prstGeom prst="rect">
-            <a:avLst/>
-          </a:prstGeom>
-        </p:spPr>
-      </p:pic>
-      <p:sp>
-        <p:nvSpPr>
-          <p:cNvPr id="10" name="Text 7"/>
-          <p:cNvSpPr/>
-          <p:nvPr/>
-        </p:nvSpPr>
-        <p:spPr>
-          <a:xfrm>
-            <a:off x="1097280" y="1417320"/>
-            <a:ext cx="3108960" cy="411480"/>
-          </a:xfrm>
-          <a:prstGeom prst="rect">
-            <a:avLst/>
-          </a:prstGeom>
-          <a:noFill/>
-          <a:ln/>
-        </p:spPr>
-        <p:txBody>
-          <a:bodyPr wrap="square" lIns="0" tIns="0" rIns="0" bIns="0" rtlCol="0" anchor="ctr"/>
-          <a:lstStyle/>
-          <a:p>
-            <a:pPr marL="0" indent="0" algn="l">
-              <a:buNone/>
-            </a:pPr>
-            <a:r>
-              <a:rPr lang="en-US" sz="1500" b="1" dirty="0">
-                <a:solidFill>
-                  <a:srgbClr val="FFFFFF"/>
-                </a:solidFill>
-                <a:latin typeface="Trebuchet MS" pitchFamily="34" charset="0"/>
-                <a:ea typeface="Trebuchet MS" pitchFamily="34" charset="-122"/>
-                <a:cs typeface="Trebuchet MS" pitchFamily="34" charset="-120"/>
-              </a:rPr>
-              <a:t>Master IAM Concepts</a:t>
-            </a:r>
-            <a:endParaRPr lang="en-US" sz="1500" dirty="0"/>
-          </a:p>
-        </p:txBody>
-      </p:sp>
-      <p:sp>
-        <p:nvSpPr>
-          <p:cNvPr id="11" name="Text 8"/>
-          <p:cNvSpPr/>
-          <p:nvPr/>
-        </p:nvSpPr>
-        <p:spPr>
-          <a:xfrm>
-            <a:off x="1097280" y="1828800"/>
-            <a:ext cx="3108960" cy="731520"/>
-          </a:xfrm>
-          <a:prstGeom prst="rect">
-            <a:avLst/>
-          </a:prstGeom>
-          <a:noFill/>
-          <a:ln/>
-        </p:spPr>
-        <p:txBody>
-          <a:bodyPr wrap="square" lIns="0" tIns="0" rIns="0" bIns="0" rtlCol="0" anchor="ctr"/>
-          <a:lstStyle/>
-          <a:p>
-            <a:pPr marL="0" indent="0" algn="l">
-              <a:buNone/>
-            </a:pPr>
-            <a:r>
-              <a:rPr lang="en-US" sz="1050" dirty="0">
-                <a:solidFill>
-                  <a:srgbClr val="D1DCE8"/>
-                </a:solidFill>
-                <a:latin typeface="Calibri" pitchFamily="34" charset="0"/>
-                <a:ea typeface="Calibri" pitchFamily="34" charset="-122"/>
-                <a:cs typeface="Calibri" pitchFamily="34" charset="-120"/>
-              </a:rPr>
-              <a:t>Deep dive into identity lifecycle, Zero Trust principles, access governance, and enterprise IAM frameworks.</a:t>
-            </a:r>
-            <a:endParaRPr lang="en-US" sz="1050" dirty="0"/>
-          </a:p>
-        </p:txBody>
-      </p:sp>
-      <p:sp>
-        <p:nvSpPr>
-          <p:cNvPr id="12" name="Shape 9"/>
-          <p:cNvSpPr/>
-          <p:nvPr/>
-        </p:nvSpPr>
-        <p:spPr>
-          <a:xfrm>
-            <a:off x="4754880" y="1234440"/>
-            <a:ext cx="4114800" cy="1600200"/>
-          </a:xfrm>
-          <a:prstGeom prst="rect">
-            <a:avLst/>
-          </a:prstGeom>
-          <a:solidFill>
-            <a:srgbClr val="1A2E42"/>
-          </a:solidFill>
-          <a:ln w="12700">
-            <a:solidFill>
-              <a:srgbClr val="1A2E42"/>
-            </a:solidFill>
-            <a:prstDash val="solid"/>
-          </a:ln>
-          <a:effectLst>
-            <a:outerShdw blurRad="127000" dist="38100" dir="8100000" algn="bl" rotWithShape="0">
-              <a:srgbClr val="000000">
-                <a:alpha val="20000"/>
-              </a:srgbClr>
-            </a:outerShdw>
-          </a:effectLst>
-        </p:spPr>
-        <p:txBody>
-          <a:bodyPr/>
-          <a:lstStyle/>
-          <a:p>
-            <a:endParaRPr lang="en-US"/>
-          </a:p>
-        </p:txBody>
-      </p:sp>
-      <p:sp>
-        <p:nvSpPr>
-          <p:cNvPr id="13" name="Shape 10"/>
-          <p:cNvSpPr/>
-          <p:nvPr/>
-        </p:nvSpPr>
-        <p:spPr>
-          <a:xfrm>
-            <a:off x="4919472" y="1618488"/>
-            <a:ext cx="502920" cy="502920"/>
-          </a:xfrm>
-          <a:prstGeom prst="ellipse">
-            <a:avLst/>
-          </a:prstGeom>
-          <a:solidFill>
-            <a:srgbClr val="1A2E42"/>
-          </a:solidFill>
-          <a:ln w="12700">
-            <a:solidFill>
-              <a:srgbClr val="1A2E42"/>
-            </a:solidFill>
-            <a:prstDash val="solid"/>
-          </a:ln>
-        </p:spPr>
-        <p:txBody>
-          <a:bodyPr/>
-          <a:lstStyle/>
-          <a:p>
-            <a:endParaRPr lang="en-US"/>
-          </a:p>
-        </p:txBody>
-      </p:sp>
-      <p:pic>
-        <p:nvPicPr>
-          <p:cNvPr id="14" name="Image 1" descr="preencoded.png"/>
-          <p:cNvPicPr>
-            <a:picLocks noChangeAspect="1"/>
-          </p:cNvPicPr>
-          <p:nvPr/>
-        </p:nvPicPr>
-        <p:blipFill>
-          <a:blip r:embed="rId4"/>
-          <a:stretch>
-            <a:fillRect/>
-          </a:stretch>
-        </p:blipFill>
-        <p:spPr>
-          <a:xfrm>
-            <a:off x="4946904" y="1645920"/>
-            <a:ext cx="438912" cy="438912"/>
-          </a:xfrm>
-          <a:prstGeom prst="rect">
-            <a:avLst/>
-          </a:prstGeom>
-        </p:spPr>
-      </p:pic>
-      <p:sp>
-        <p:nvSpPr>
-          <p:cNvPr id="15" name="Text 11"/>
-          <p:cNvSpPr/>
-          <p:nvPr/>
-        </p:nvSpPr>
-        <p:spPr>
-          <a:xfrm>
-            <a:off x="5532120" y="1417320"/>
-            <a:ext cx="3108960" cy="411480"/>
-          </a:xfrm>
-          <a:prstGeom prst="rect">
-            <a:avLst/>
-          </a:prstGeom>
-          <a:noFill/>
-          <a:ln/>
-        </p:spPr>
-        <p:txBody>
-          <a:bodyPr wrap="square" lIns="0" tIns="0" rIns="0" bIns="0" rtlCol="0" anchor="ctr"/>
-          <a:lstStyle/>
-          <a:p>
-            <a:pPr marL="0" indent="0" algn="l">
-              <a:buNone/>
-            </a:pPr>
-            <a:r>
-              <a:rPr lang="en-US" sz="1500" b="1" dirty="0">
-                <a:solidFill>
-                  <a:srgbClr val="FFFFFF"/>
-                </a:solidFill>
-                <a:latin typeface="Trebuchet MS" pitchFamily="34" charset="0"/>
-                <a:ea typeface="Trebuchet MS" pitchFamily="34" charset="-122"/>
-                <a:cs typeface="Trebuchet MS" pitchFamily="34" charset="-120"/>
-              </a:rPr>
-              <a:t>Python Application Dev</a:t>
-            </a:r>
-            <a:endParaRPr lang="en-US" sz="1500" dirty="0"/>
-          </a:p>
-        </p:txBody>
-      </p:sp>
-      <p:sp>
-        <p:nvSpPr>
-          <p:cNvPr id="16" name="Text 12"/>
-          <p:cNvSpPr/>
-          <p:nvPr/>
-        </p:nvSpPr>
-        <p:spPr>
-          <a:xfrm>
-            <a:off x="5532120" y="1828800"/>
-            <a:ext cx="3108960" cy="731520"/>
-          </a:xfrm>
-          <a:prstGeom prst="rect">
-            <a:avLst/>
-          </a:prstGeom>
-          <a:noFill/>
-          <a:ln/>
-        </p:spPr>
-        <p:txBody>
-          <a:bodyPr wrap="square" lIns="0" tIns="0" rIns="0" bIns="0" rtlCol="0" anchor="ctr"/>
-          <a:lstStyle/>
-          <a:p>
-            <a:pPr marL="0" indent="0" algn="l">
-              <a:buNone/>
-            </a:pPr>
-            <a:r>
-              <a:rPr lang="en-US" sz="1050" dirty="0">
-                <a:solidFill>
-                  <a:srgbClr val="D1DCE8"/>
-                </a:solidFill>
-                <a:latin typeface="Calibri" pitchFamily="34" charset="0"/>
-                <a:ea typeface="Calibri" pitchFamily="34" charset="-122"/>
-                <a:cs typeface="Calibri" pitchFamily="34" charset="-120"/>
-              </a:rPr>
-              <a:t>Build real-world Python apps that solve practical problems — from fitness planners to automation scripts.</a:t>
-            </a:r>
-            <a:endParaRPr lang="en-US" sz="1050" dirty="0"/>
-          </a:p>
-        </p:txBody>
-      </p:sp>
-      <p:sp>
-        <p:nvSpPr>
-          <p:cNvPr id="17" name="Shape 13"/>
-          <p:cNvSpPr/>
-          <p:nvPr/>
-        </p:nvSpPr>
-        <p:spPr>
-          <a:xfrm>
-            <a:off x="320040" y="3063240"/>
-            <a:ext cx="4114800" cy="1600200"/>
-          </a:xfrm>
-          <a:prstGeom prst="rect">
-            <a:avLst/>
-          </a:prstGeom>
-          <a:solidFill>
-            <a:srgbClr val="1A2E42"/>
-          </a:solidFill>
-          <a:ln w="12700">
-            <a:solidFill>
-              <a:srgbClr val="1A2E42"/>
-            </a:solidFill>
-            <a:prstDash val="solid"/>
-          </a:ln>
-          <a:effectLst>
-            <a:outerShdw blurRad="127000" dist="38100" dir="8100000" algn="bl" rotWithShape="0">
-              <a:srgbClr val="000000">
-                <a:alpha val="20000"/>
-              </a:srgbClr>
-            </a:outerShdw>
-          </a:effectLst>
-        </p:spPr>
-        <p:txBody>
-          <a:bodyPr/>
-          <a:lstStyle/>
-          <a:p>
-            <a:endParaRPr lang="en-US"/>
-          </a:p>
-        </p:txBody>
-      </p:sp>
-      <p:sp>
-        <p:nvSpPr>
-          <p:cNvPr id="18" name="Shape 14"/>
-          <p:cNvSpPr/>
-          <p:nvPr/>
-        </p:nvSpPr>
-        <p:spPr>
-          <a:xfrm>
-            <a:off x="484632" y="3447288"/>
-            <a:ext cx="502920" cy="502920"/>
-          </a:xfrm>
-          <a:prstGeom prst="ellipse">
-            <a:avLst/>
-          </a:prstGeom>
-          <a:solidFill>
-            <a:srgbClr val="1A2E42"/>
-          </a:solidFill>
-          <a:ln w="12700">
-            <a:solidFill>
-              <a:srgbClr val="1A2E42"/>
-            </a:solidFill>
-            <a:prstDash val="solid"/>
-          </a:ln>
-        </p:spPr>
-        <p:txBody>
-          <a:bodyPr/>
-          <a:lstStyle/>
-          <a:p>
-            <a:endParaRPr lang="en-US"/>
-          </a:p>
-        </p:txBody>
-      </p:sp>
-      <p:pic>
-        <p:nvPicPr>
-          <p:cNvPr id="19" name="Image 2" descr="preencoded.png"/>
-          <p:cNvPicPr>
-            <a:picLocks noChangeAspect="1"/>
-          </p:cNvPicPr>
-          <p:nvPr/>
-        </p:nvPicPr>
-        <p:blipFill>
-          <a:blip r:embed="rId5"/>
-          <a:stretch>
-            <a:fillRect/>
-          </a:stretch>
-        </p:blipFill>
-        <p:spPr>
-          <a:xfrm>
-            <a:off x="512064" y="3474720"/>
-            <a:ext cx="438912" cy="438912"/>
-          </a:xfrm>
-          <a:prstGeom prst="rect">
-            <a:avLst/>
-          </a:prstGeom>
-        </p:spPr>
-      </p:pic>
-      <p:sp>
-        <p:nvSpPr>
-          <p:cNvPr id="20" name="Text 15"/>
-          <p:cNvSpPr/>
-          <p:nvPr/>
-        </p:nvSpPr>
-        <p:spPr>
-          <a:xfrm>
-            <a:off x="1097280" y="3246120"/>
-            <a:ext cx="3108960" cy="411480"/>
-          </a:xfrm>
-          <a:prstGeom prst="rect">
-            <a:avLst/>
-          </a:prstGeom>
-          <a:noFill/>
-          <a:ln/>
-        </p:spPr>
-        <p:txBody>
-          <a:bodyPr wrap="square" lIns="0" tIns="0" rIns="0" bIns="0" rtlCol="0" anchor="ctr"/>
-          <a:lstStyle/>
-          <a:p>
-            <a:pPr marL="0" indent="0" algn="l">
-              <a:buNone/>
-            </a:pPr>
-            <a:r>
-              <a:rPr lang="en-US" sz="1500" b="1" dirty="0">
-                <a:solidFill>
-                  <a:srgbClr val="FFFFFF"/>
-                </a:solidFill>
-                <a:latin typeface="Trebuchet MS" pitchFamily="34" charset="0"/>
-                <a:ea typeface="Trebuchet MS" pitchFamily="34" charset="-122"/>
-                <a:cs typeface="Trebuchet MS" pitchFamily="34" charset="-120"/>
-              </a:rPr>
-              <a:t>Security Architecture</a:t>
-            </a:r>
-            <a:endParaRPr lang="en-US" sz="1500" dirty="0"/>
-          </a:p>
-        </p:txBody>
-      </p:sp>
-      <p:sp>
-        <p:nvSpPr>
-          <p:cNvPr id="21" name="Text 16"/>
-          <p:cNvSpPr/>
-          <p:nvPr/>
-        </p:nvSpPr>
-        <p:spPr>
-          <a:xfrm>
-            <a:off x="1097280" y="3657600"/>
-            <a:ext cx="3108960" cy="731520"/>
-          </a:xfrm>
-          <a:prstGeom prst="rect">
-            <a:avLst/>
-          </a:prstGeom>
-          <a:noFill/>
-          <a:ln/>
-        </p:spPr>
-        <p:txBody>
-          <a:bodyPr wrap="square" lIns="0" tIns="0" rIns="0" bIns="0" rtlCol="0" anchor="ctr"/>
-          <a:lstStyle/>
-          <a:p>
-            <a:pPr marL="0" indent="0" algn="l">
-              <a:buNone/>
-            </a:pPr>
-            <a:r>
-              <a:rPr lang="en-US" sz="1050" dirty="0">
-                <a:solidFill>
-                  <a:srgbClr val="D1DCE8"/>
-                </a:solidFill>
-                <a:latin typeface="Calibri" pitchFamily="34" charset="0"/>
-                <a:ea typeface="Calibri" pitchFamily="34" charset="-122"/>
-                <a:cs typeface="Calibri" pitchFamily="34" charset="-120"/>
-              </a:rPr>
-              <a:t>Design and document enterprise-grade security platforms with cloud IAM, threat detection, and compliance.</a:t>
-            </a:r>
-            <a:endParaRPr lang="en-US" sz="1050" dirty="0"/>
-          </a:p>
-        </p:txBody>
-      </p:sp>
-      <p:sp>
-        <p:nvSpPr>
-          <p:cNvPr id="22" name="Shape 17"/>
-          <p:cNvSpPr/>
-          <p:nvPr/>
-        </p:nvSpPr>
-        <p:spPr>
-          <a:xfrm>
-            <a:off x="4754880" y="3063240"/>
-            <a:ext cx="4114800" cy="1600200"/>
-          </a:xfrm>
-          <a:prstGeom prst="rect">
-            <a:avLst/>
-          </a:prstGeom>
-          <a:solidFill>
-            <a:srgbClr val="1A2E42"/>
-          </a:solidFill>
-          <a:ln w="12700">
-            <a:solidFill>
-              <a:srgbClr val="1A2E42"/>
-            </a:solidFill>
-            <a:prstDash val="solid"/>
-          </a:ln>
-          <a:effectLst>
-            <a:outerShdw blurRad="127000" dist="38100" dir="8100000" algn="bl" rotWithShape="0">
-              <a:srgbClr val="000000">
-                <a:alpha val="20000"/>
-              </a:srgbClr>
-            </a:outerShdw>
-          </a:effectLst>
-        </p:spPr>
-        <p:txBody>
-          <a:bodyPr/>
-          <a:lstStyle/>
-          <a:p>
-            <a:endParaRPr lang="en-US"/>
-          </a:p>
-        </p:txBody>
-      </p:sp>
-      <p:sp>
-        <p:nvSpPr>
-          <p:cNvPr id="23" name="Shape 18"/>
-          <p:cNvSpPr/>
-          <p:nvPr/>
-        </p:nvSpPr>
-        <p:spPr>
-          <a:xfrm>
-            <a:off x="4919472" y="3447288"/>
-            <a:ext cx="502920" cy="502920"/>
-          </a:xfrm>
-          <a:prstGeom prst="ellipse">
-            <a:avLst/>
-          </a:prstGeom>
-          <a:solidFill>
-            <a:srgbClr val="1A2E42"/>
-          </a:solidFill>
-          <a:ln w="12700">
-            <a:solidFill>
-              <a:srgbClr val="1A2E42"/>
-            </a:solidFill>
-            <a:prstDash val="solid"/>
-          </a:ln>
-        </p:spPr>
-        <p:txBody>
-          <a:bodyPr/>
-          <a:lstStyle/>
-          <a:p>
-            <a:endParaRPr lang="en-US"/>
-          </a:p>
-        </p:txBody>
-      </p:sp>
-      <p:pic>
-        <p:nvPicPr>
-          <p:cNvPr id="24" name="Image 3" descr="preencoded.png"/>
-          <p:cNvPicPr>
-            <a:picLocks noChangeAspect="1"/>
-          </p:cNvPicPr>
-          <p:nvPr/>
-        </p:nvPicPr>
-        <p:blipFill>
-          <a:blip r:embed="rId6"/>
-          <a:stretch>
-            <a:fillRect/>
-          </a:stretch>
-        </p:blipFill>
-        <p:spPr>
-          <a:xfrm>
-            <a:off x="4946904" y="3474720"/>
-            <a:ext cx="438912" cy="438912"/>
-          </a:xfrm>
-          <a:prstGeom prst="rect">
-            <a:avLst/>
-          </a:prstGeom>
-        </p:spPr>
-      </p:pic>
-      <p:sp>
-        <p:nvSpPr>
-          <p:cNvPr id="25" name="Text 19"/>
-          <p:cNvSpPr/>
-          <p:nvPr/>
-        </p:nvSpPr>
-        <p:spPr>
-          <a:xfrm>
-            <a:off x="5532120" y="3246120"/>
-            <a:ext cx="3108960" cy="411480"/>
-          </a:xfrm>
-          <a:prstGeom prst="rect">
-            <a:avLst/>
-          </a:prstGeom>
-          <a:noFill/>
-          <a:ln/>
-        </p:spPr>
-        <p:txBody>
-          <a:bodyPr wrap="square" lIns="0" tIns="0" rIns="0" bIns="0" rtlCol="0" anchor="ctr"/>
-          <a:lstStyle/>
-          <a:p>
-            <a:pPr marL="0" indent="0" algn="l">
-              <a:buNone/>
-            </a:pPr>
-            <a:r>
-              <a:rPr lang="en-US" sz="1500" b="1" dirty="0">
-                <a:solidFill>
-                  <a:srgbClr val="FFFFFF"/>
-                </a:solidFill>
-                <a:latin typeface="Trebuchet MS" pitchFamily="34" charset="0"/>
-                <a:ea typeface="Trebuchet MS" pitchFamily="34" charset="-122"/>
-                <a:cs typeface="Trebuchet MS" pitchFamily="34" charset="-120"/>
-              </a:rPr>
-              <a:t>Professional Portfolio</a:t>
-            </a:r>
-            <a:endParaRPr lang="en-US" sz="1500" dirty="0"/>
-          </a:p>
-        </p:txBody>
-      </p:sp>
-      <p:sp>
-        <p:nvSpPr>
-          <p:cNvPr id="26" name="Text 20"/>
-          <p:cNvSpPr/>
-          <p:nvPr/>
-        </p:nvSpPr>
-        <p:spPr>
-          <a:xfrm>
-            <a:off x="5532120" y="3657600"/>
-            <a:ext cx="3108960" cy="731520"/>
-          </a:xfrm>
-          <a:prstGeom prst="rect">
-            <a:avLst/>
-          </a:prstGeom>
-          <a:noFill/>
-          <a:ln/>
-        </p:spPr>
-        <p:txBody>
-          <a:bodyPr wrap="square" lIns="0" tIns="0" rIns="0" bIns="0" rtlCol="0" anchor="ctr"/>
-          <a:lstStyle/>
-          <a:p>
-            <a:pPr marL="0" indent="0" algn="l">
-              <a:buNone/>
-            </a:pPr>
-            <a:r>
-              <a:rPr lang="en-US" sz="1050" dirty="0">
-                <a:solidFill>
-                  <a:srgbClr val="D1DCE8"/>
-                </a:solidFill>
-                <a:latin typeface="Calibri" pitchFamily="34" charset="0"/>
-                <a:ea typeface="Calibri" pitchFamily="34" charset="-122"/>
-                <a:cs typeface="Calibri" pitchFamily="34" charset="-120"/>
-              </a:rPr>
-              <a:t>Deliver polished, production-quality projects that demonstrate readiness for senior engineering roles.</a:t>
-            </a:r>
-            <a:endParaRPr lang="en-US" sz="1050" dirty="0"/>
-          </a:p>
-        </p:txBody>
-      </p:sp>
-    </p:spTree>
-  </p:cSld>
-  <p:clrMapOvr>
-    <a:masterClrMapping/>
-  </p:clrMapOvr>
-</p:sld>
-</file>
-
-<file path=ppt/slides/slide4.xml><?xml version="1.0" encoding="utf-8"?>
-<p:sld xmlns:a="http://schemas.openxmlformats.org/drawingml/2006/main" xmlns:r="http://schemas.openxmlformats.org/officeDocument/2006/relationships" xmlns:p="http://schemas.openxmlformats.org/presentationml/2006/main">
   <p:cSld name="Slide 4">
     <p:bg>
       <p:bgPr>
@@ -5153,7 +3444,7 @@
 </p:sld>
 </file>
 
-<file path=ppt/slides/slide5.xml><?xml version="1.0" encoding="utf-8"?>
+<file path=ppt/slides/slide3.xml><?xml version="1.0" encoding="utf-8"?>
 <p:sld xmlns:a="http://schemas.openxmlformats.org/drawingml/2006/main" xmlns:r="http://schemas.openxmlformats.org/officeDocument/2006/relationships" xmlns:p="http://schemas.openxmlformats.org/presentationml/2006/main">
   <p:cSld name="Slide 5">
     <p:bg>
@@ -5983,7 +4274,7 @@
 </p:sld>
 </file>
 
-<file path=ppt/slides/slide6.xml><?xml version="1.0" encoding="utf-8"?>
+<file path=ppt/slides/slide4.xml><?xml version="1.0" encoding="utf-8"?>
 <p:sld xmlns:a="http://schemas.openxmlformats.org/drawingml/2006/main" xmlns:r="http://schemas.openxmlformats.org/officeDocument/2006/relationships" xmlns:p="http://schemas.openxmlformats.org/presentationml/2006/main">
   <p:cSld name="Slide 6">
     <p:bg>
@@ -6036,7 +4327,7 @@
           <a:bodyPr/>
           <a:lstStyle/>
           <a:p>
-            <a:endParaRPr lang="en-US"/>
+            <a:endParaRPr lang="en-US" dirty="0"/>
           </a:p>
         </p:txBody>
       </p:sp>
@@ -6120,7 +4411,7 @@
       </p:sp>
       <p:sp>
         <p:nvSpPr>
-          <p:cNvPr id="5" name="Shape 3"/>
+          <p:cNvPr id="6" name="Text 4"/>
           <p:cNvSpPr/>
           <p:nvPr/>
         </p:nvSpPr>
@@ -6132,38 +4423,6 @@
           <a:prstGeom prst="rect">
             <a:avLst/>
           </a:prstGeom>
-          <a:solidFill>
-            <a:srgbClr val="2DC97E"/>
-          </a:solidFill>
-          <a:ln w="12700">
-            <a:solidFill>
-              <a:srgbClr val="2DC97E"/>
-            </a:solidFill>
-            <a:prstDash val="solid"/>
-          </a:ln>
-        </p:spPr>
-        <p:txBody>
-          <a:bodyPr/>
-          <a:lstStyle/>
-          <a:p>
-            <a:endParaRPr lang="en-US"/>
-          </a:p>
-        </p:txBody>
-      </p:sp>
-      <p:sp>
-        <p:nvSpPr>
-          <p:cNvPr id="6" name="Text 4"/>
-          <p:cNvSpPr/>
-          <p:nvPr/>
-        </p:nvSpPr>
-        <p:spPr>
-          <a:xfrm>
-            <a:off x="7772400" y="228600"/>
-            <a:ext cx="1097280" cy="548640"/>
-          </a:xfrm>
-          <a:prstGeom prst="rect">
-            <a:avLst/>
-          </a:prstGeom>
           <a:noFill/>
           <a:ln/>
         </p:spPr>
@@ -6174,17 +4433,6 @@
             <a:pPr marL="0" indent="0" algn="ctr">
               <a:buNone/>
             </a:pPr>
-            <a:r>
-              <a:rPr lang="en-US" sz="1300" b="1" dirty="0">
-                <a:solidFill>
-                  <a:srgbClr val="FFFFFF"/>
-                </a:solidFill>
-                <a:latin typeface="Calibri" pitchFamily="34" charset="0"/>
-                <a:ea typeface="Calibri" pitchFamily="34" charset="-122"/>
-                <a:cs typeface="Calibri" pitchFamily="34" charset="-120"/>
-              </a:rPr>
-              <a:t>02 / 03</a:t>
-            </a:r>
             <a:endParaRPr lang="en-US" sz="1300" dirty="0"/>
           </a:p>
         </p:txBody>
@@ -7789,7 +6037,7 @@
 </p:sld>
 </file>
 
-<file path=ppt/slides/slide7.xml><?xml version="1.0" encoding="utf-8"?>
+<file path=ppt/slides/slide5.xml><?xml version="1.0" encoding="utf-8"?>
 <p:sld xmlns:a="http://schemas.openxmlformats.org/drawingml/2006/main" xmlns:r="http://schemas.openxmlformats.org/officeDocument/2006/relationships" xmlns:p="http://schemas.openxmlformats.org/presentationml/2006/main">
   <p:cSld name="Slide 7">
     <p:bg>
@@ -8551,7 +6799,7 @@
 </p:sld>
 </file>
 
-<file path=ppt/slides/slide8.xml><?xml version="1.0" encoding="utf-8"?>
+<file path=ppt/slides/slide6.xml><?xml version="1.0" encoding="utf-8"?>
 <p:sld xmlns:a="http://schemas.openxmlformats.org/drawingml/2006/main" xmlns:r="http://schemas.openxmlformats.org/officeDocument/2006/relationships" xmlns:p="http://schemas.openxmlformats.org/presentationml/2006/main">
   <p:cSld name="Slide 8">
     <p:bg>
@@ -8688,7 +6936,7 @@
       </p:sp>
       <p:sp>
         <p:nvSpPr>
-          <p:cNvPr id="5" name="Shape 3"/>
+          <p:cNvPr id="6" name="Text 4"/>
           <p:cNvSpPr/>
           <p:nvPr/>
         </p:nvSpPr>
@@ -8700,38 +6948,6 @@
           <a:prstGeom prst="rect">
             <a:avLst/>
           </a:prstGeom>
-          <a:solidFill>
-            <a:srgbClr val="00B4D8"/>
-          </a:solidFill>
-          <a:ln w="12700">
-            <a:solidFill>
-              <a:srgbClr val="00B4D8"/>
-            </a:solidFill>
-            <a:prstDash val="solid"/>
-          </a:ln>
-        </p:spPr>
-        <p:txBody>
-          <a:bodyPr/>
-          <a:lstStyle/>
-          <a:p>
-            <a:endParaRPr lang="en-US"/>
-          </a:p>
-        </p:txBody>
-      </p:sp>
-      <p:sp>
-        <p:nvSpPr>
-          <p:cNvPr id="6" name="Text 4"/>
-          <p:cNvSpPr/>
-          <p:nvPr/>
-        </p:nvSpPr>
-        <p:spPr>
-          <a:xfrm>
-            <a:off x="7772400" y="228600"/>
-            <a:ext cx="1097280" cy="548640"/>
-          </a:xfrm>
-          <a:prstGeom prst="rect">
-            <a:avLst/>
-          </a:prstGeom>
           <a:noFill/>
           <a:ln/>
         </p:spPr>
@@ -8742,17 +6958,6 @@
             <a:pPr marL="0" indent="0" algn="ctr">
               <a:buNone/>
             </a:pPr>
-            <a:r>
-              <a:rPr lang="en-US" sz="1300" b="1" dirty="0">
-                <a:solidFill>
-                  <a:srgbClr val="FFFFFF"/>
-                </a:solidFill>
-                <a:latin typeface="Calibri" pitchFamily="34" charset="0"/>
-                <a:ea typeface="Calibri" pitchFamily="34" charset="-122"/>
-                <a:cs typeface="Calibri" pitchFamily="34" charset="-120"/>
-              </a:rPr>
-              <a:t>03 / 03</a:t>
-            </a:r>
             <a:endParaRPr lang="en-US" sz="1300" dirty="0"/>
           </a:p>
         </p:txBody>
@@ -9946,7 +8151,7 @@
 </p:sld>
 </file>
 
-<file path=ppt/slides/slide9.xml><?xml version="1.0" encoding="utf-8"?>
+<file path=ppt/slides/slide7.xml><?xml version="1.0" encoding="utf-8"?>
 <p:sld xmlns:a="http://schemas.openxmlformats.org/drawingml/2006/main" xmlns:r="http://schemas.openxmlformats.org/officeDocument/2006/relationships" xmlns:p="http://schemas.openxmlformats.org/presentationml/2006/main">
   <p:cSld name="Slide 9">
     <p:bg>
